--- a/你愛永不變.pptx
+++ b/你愛永不變.pptx
@@ -169,7 +169,7 @@
           <a:lstStyle/>
           <a:p>
             <a:r>
-              <a:rPr lang="en-US" altLang="zh-TW" smtClean="0"/>
+              <a:rPr lang="en-US" altLang="zh-TW"/>
               <a:t>Click to edit Master title style</a:t>
             </a:r>
             <a:endParaRPr lang="zh-TW" altLang="en-US"/>
@@ -288,7 +288,7 @@
           </a:lstStyle>
           <a:p>
             <a:r>
-              <a:rPr lang="en-US" altLang="zh-TW" smtClean="0"/>
+              <a:rPr lang="en-US" altLang="zh-TW"/>
               <a:t>Click to edit Master subtitle style</a:t>
             </a:r>
             <a:endParaRPr lang="zh-TW" altLang="en-US"/>
@@ -313,7 +313,7 @@
             <a:fld id="{BC4F40AC-92D7-480D-97D1-79286808B11F}" type="datetimeFigureOut">
               <a:rPr lang="zh-TW" altLang="en-US" smtClean="0"/>
               <a:pPr/>
-              <a:t>2023/6/3</a:t>
+              <a:t>2025/10/31</a:t>
             </a:fld>
             <a:endParaRPr lang="zh-TW" altLang="en-US"/>
           </a:p>
@@ -403,7 +403,7 @@
           <a:lstStyle/>
           <a:p>
             <a:r>
-              <a:rPr lang="en-US" altLang="zh-TW" smtClean="0"/>
+              <a:rPr lang="en-US" altLang="zh-TW"/>
               <a:t>Click to edit Master title style</a:t>
             </a:r>
             <a:endParaRPr lang="zh-TW" altLang="en-US"/>
@@ -427,35 +427,35 @@
           <a:p>
             <a:pPr lvl="0"/>
             <a:r>
-              <a:rPr lang="en-US" altLang="zh-TW" smtClean="0"/>
+              <a:rPr lang="en-US" altLang="zh-TW"/>
               <a:t>Click to edit Master text styles</a:t>
             </a:r>
           </a:p>
           <a:p>
             <a:pPr lvl="1"/>
             <a:r>
-              <a:rPr lang="en-US" altLang="zh-TW" smtClean="0"/>
+              <a:rPr lang="en-US" altLang="zh-TW"/>
               <a:t>Second level</a:t>
             </a:r>
           </a:p>
           <a:p>
             <a:pPr lvl="2"/>
             <a:r>
-              <a:rPr lang="en-US" altLang="zh-TW" smtClean="0"/>
+              <a:rPr lang="en-US" altLang="zh-TW"/>
               <a:t>Third level</a:t>
             </a:r>
           </a:p>
           <a:p>
             <a:pPr lvl="3"/>
             <a:r>
-              <a:rPr lang="en-US" altLang="zh-TW" smtClean="0"/>
+              <a:rPr lang="en-US" altLang="zh-TW"/>
               <a:t>Fourth level</a:t>
             </a:r>
           </a:p>
           <a:p>
             <a:pPr lvl="4"/>
             <a:r>
-              <a:rPr lang="en-US" altLang="zh-TW" smtClean="0"/>
+              <a:rPr lang="en-US" altLang="zh-TW"/>
               <a:t>Fifth level</a:t>
             </a:r>
             <a:endParaRPr lang="zh-TW" altLang="en-US"/>
@@ -480,7 +480,7 @@
             <a:fld id="{BC4F40AC-92D7-480D-97D1-79286808B11F}" type="datetimeFigureOut">
               <a:rPr lang="zh-TW" altLang="en-US" smtClean="0"/>
               <a:pPr/>
-              <a:t>2023/6/3</a:t>
+              <a:t>2025/10/31</a:t>
             </a:fld>
             <a:endParaRPr lang="zh-TW" altLang="en-US"/>
           </a:p>
@@ -575,7 +575,7 @@
           <a:lstStyle/>
           <a:p>
             <a:r>
-              <a:rPr lang="en-US" altLang="zh-TW" smtClean="0"/>
+              <a:rPr lang="en-US" altLang="zh-TW"/>
               <a:t>Click to edit Master title style</a:t>
             </a:r>
             <a:endParaRPr lang="zh-TW" altLang="en-US"/>
@@ -604,35 +604,35 @@
           <a:p>
             <a:pPr lvl="0"/>
             <a:r>
-              <a:rPr lang="en-US" altLang="zh-TW" smtClean="0"/>
+              <a:rPr lang="en-US" altLang="zh-TW"/>
               <a:t>Click to edit Master text styles</a:t>
             </a:r>
           </a:p>
           <a:p>
             <a:pPr lvl="1"/>
             <a:r>
-              <a:rPr lang="en-US" altLang="zh-TW" smtClean="0"/>
+              <a:rPr lang="en-US" altLang="zh-TW"/>
               <a:t>Second level</a:t>
             </a:r>
           </a:p>
           <a:p>
             <a:pPr lvl="2"/>
             <a:r>
-              <a:rPr lang="en-US" altLang="zh-TW" smtClean="0"/>
+              <a:rPr lang="en-US" altLang="zh-TW"/>
               <a:t>Third level</a:t>
             </a:r>
           </a:p>
           <a:p>
             <a:pPr lvl="3"/>
             <a:r>
-              <a:rPr lang="en-US" altLang="zh-TW" smtClean="0"/>
+              <a:rPr lang="en-US" altLang="zh-TW"/>
               <a:t>Fourth level</a:t>
             </a:r>
           </a:p>
           <a:p>
             <a:pPr lvl="4"/>
             <a:r>
-              <a:rPr lang="en-US" altLang="zh-TW" smtClean="0"/>
+              <a:rPr lang="en-US" altLang="zh-TW"/>
               <a:t>Fifth level</a:t>
             </a:r>
             <a:endParaRPr lang="zh-TW" altLang="en-US"/>
@@ -657,7 +657,7 @@
             <a:fld id="{BC4F40AC-92D7-480D-97D1-79286808B11F}" type="datetimeFigureOut">
               <a:rPr lang="zh-TW" altLang="en-US" smtClean="0"/>
               <a:pPr/>
-              <a:t>2023/6/3</a:t>
+              <a:t>2025/10/31</a:t>
             </a:fld>
             <a:endParaRPr lang="zh-TW" altLang="en-US"/>
           </a:p>
@@ -747,7 +747,7 @@
           <a:lstStyle/>
           <a:p>
             <a:r>
-              <a:rPr lang="en-US" altLang="zh-TW" smtClean="0"/>
+              <a:rPr lang="en-US" altLang="zh-TW"/>
               <a:t>Click to edit Master title style</a:t>
             </a:r>
             <a:endParaRPr lang="zh-TW" altLang="en-US"/>
@@ -771,35 +771,35 @@
           <a:p>
             <a:pPr lvl="0"/>
             <a:r>
-              <a:rPr lang="en-US" altLang="zh-TW" smtClean="0"/>
+              <a:rPr lang="en-US" altLang="zh-TW"/>
               <a:t>Click to edit Master text styles</a:t>
             </a:r>
           </a:p>
           <a:p>
             <a:pPr lvl="1"/>
             <a:r>
-              <a:rPr lang="en-US" altLang="zh-TW" smtClean="0"/>
+              <a:rPr lang="en-US" altLang="zh-TW"/>
               <a:t>Second level</a:t>
             </a:r>
           </a:p>
           <a:p>
             <a:pPr lvl="2"/>
             <a:r>
-              <a:rPr lang="en-US" altLang="zh-TW" smtClean="0"/>
+              <a:rPr lang="en-US" altLang="zh-TW"/>
               <a:t>Third level</a:t>
             </a:r>
           </a:p>
           <a:p>
             <a:pPr lvl="3"/>
             <a:r>
-              <a:rPr lang="en-US" altLang="zh-TW" smtClean="0"/>
+              <a:rPr lang="en-US" altLang="zh-TW"/>
               <a:t>Fourth level</a:t>
             </a:r>
           </a:p>
           <a:p>
             <a:pPr lvl="4"/>
             <a:r>
-              <a:rPr lang="en-US" altLang="zh-TW" smtClean="0"/>
+              <a:rPr lang="en-US" altLang="zh-TW"/>
               <a:t>Fifth level</a:t>
             </a:r>
             <a:endParaRPr lang="zh-TW" altLang="en-US"/>
@@ -824,7 +824,7 @@
             <a:fld id="{BC4F40AC-92D7-480D-97D1-79286808B11F}" type="datetimeFigureOut">
               <a:rPr lang="zh-TW" altLang="en-US" smtClean="0"/>
               <a:pPr/>
-              <a:t>2023/6/3</a:t>
+              <a:t>2025/10/31</a:t>
             </a:fld>
             <a:endParaRPr lang="zh-TW" altLang="en-US"/>
           </a:p>
@@ -923,7 +923,7 @@
           </a:lstStyle>
           <a:p>
             <a:r>
-              <a:rPr lang="en-US" altLang="zh-TW" smtClean="0"/>
+              <a:rPr lang="en-US" altLang="zh-TW"/>
               <a:t>Click to edit Master title style</a:t>
             </a:r>
             <a:endParaRPr lang="zh-TW" altLang="en-US"/>
@@ -1043,7 +1043,7 @@
           <a:p>
             <a:pPr lvl="0"/>
             <a:r>
-              <a:rPr lang="en-US" altLang="zh-TW" smtClean="0"/>
+              <a:rPr lang="en-US" altLang="zh-TW"/>
               <a:t>Click to edit Master text styles</a:t>
             </a:r>
           </a:p>
@@ -1067,7 +1067,7 @@
             <a:fld id="{BC4F40AC-92D7-480D-97D1-79286808B11F}" type="datetimeFigureOut">
               <a:rPr lang="zh-TW" altLang="en-US" smtClean="0"/>
               <a:pPr/>
-              <a:t>2023/6/3</a:t>
+              <a:t>2025/10/31</a:t>
             </a:fld>
             <a:endParaRPr lang="zh-TW" altLang="en-US"/>
           </a:p>
@@ -1157,7 +1157,7 @@
           <a:lstStyle/>
           <a:p>
             <a:r>
-              <a:rPr lang="en-US" altLang="zh-TW" smtClean="0"/>
+              <a:rPr lang="en-US" altLang="zh-TW"/>
               <a:t>Click to edit Master title style</a:t>
             </a:r>
             <a:endParaRPr lang="zh-TW" altLang="en-US"/>
@@ -1214,35 +1214,35 @@
           <a:p>
             <a:pPr lvl="0"/>
             <a:r>
-              <a:rPr lang="en-US" altLang="zh-TW" smtClean="0"/>
+              <a:rPr lang="en-US" altLang="zh-TW"/>
               <a:t>Click to edit Master text styles</a:t>
             </a:r>
           </a:p>
           <a:p>
             <a:pPr lvl="1"/>
             <a:r>
-              <a:rPr lang="en-US" altLang="zh-TW" smtClean="0"/>
+              <a:rPr lang="en-US" altLang="zh-TW"/>
               <a:t>Second level</a:t>
             </a:r>
           </a:p>
           <a:p>
             <a:pPr lvl="2"/>
             <a:r>
-              <a:rPr lang="en-US" altLang="zh-TW" smtClean="0"/>
+              <a:rPr lang="en-US" altLang="zh-TW"/>
               <a:t>Third level</a:t>
             </a:r>
           </a:p>
           <a:p>
             <a:pPr lvl="3"/>
             <a:r>
-              <a:rPr lang="en-US" altLang="zh-TW" smtClean="0"/>
+              <a:rPr lang="en-US" altLang="zh-TW"/>
               <a:t>Fourth level</a:t>
             </a:r>
           </a:p>
           <a:p>
             <a:pPr lvl="4"/>
             <a:r>
-              <a:rPr lang="en-US" altLang="zh-TW" smtClean="0"/>
+              <a:rPr lang="en-US" altLang="zh-TW"/>
               <a:t>Fifth level</a:t>
             </a:r>
             <a:endParaRPr lang="zh-TW" altLang="en-US"/>
@@ -1299,35 +1299,35 @@
           <a:p>
             <a:pPr lvl="0"/>
             <a:r>
-              <a:rPr lang="en-US" altLang="zh-TW" smtClean="0"/>
+              <a:rPr lang="en-US" altLang="zh-TW"/>
               <a:t>Click to edit Master text styles</a:t>
             </a:r>
           </a:p>
           <a:p>
             <a:pPr lvl="1"/>
             <a:r>
-              <a:rPr lang="en-US" altLang="zh-TW" smtClean="0"/>
+              <a:rPr lang="en-US" altLang="zh-TW"/>
               <a:t>Second level</a:t>
             </a:r>
           </a:p>
           <a:p>
             <a:pPr lvl="2"/>
             <a:r>
-              <a:rPr lang="en-US" altLang="zh-TW" smtClean="0"/>
+              <a:rPr lang="en-US" altLang="zh-TW"/>
               <a:t>Third level</a:t>
             </a:r>
           </a:p>
           <a:p>
             <a:pPr lvl="3"/>
             <a:r>
-              <a:rPr lang="en-US" altLang="zh-TW" smtClean="0"/>
+              <a:rPr lang="en-US" altLang="zh-TW"/>
               <a:t>Fourth level</a:t>
             </a:r>
           </a:p>
           <a:p>
             <a:pPr lvl="4"/>
             <a:r>
-              <a:rPr lang="en-US" altLang="zh-TW" smtClean="0"/>
+              <a:rPr lang="en-US" altLang="zh-TW"/>
               <a:t>Fifth level</a:t>
             </a:r>
             <a:endParaRPr lang="zh-TW" altLang="en-US"/>
@@ -1352,7 +1352,7 @@
             <a:fld id="{BC4F40AC-92D7-480D-97D1-79286808B11F}" type="datetimeFigureOut">
               <a:rPr lang="zh-TW" altLang="en-US" smtClean="0"/>
               <a:pPr/>
-              <a:t>2023/6/3</a:t>
+              <a:t>2025/10/31</a:t>
             </a:fld>
             <a:endParaRPr lang="zh-TW" altLang="en-US"/>
           </a:p>
@@ -1446,7 +1446,7 @@
           </a:lstStyle>
           <a:p>
             <a:r>
-              <a:rPr lang="en-US" altLang="zh-TW" smtClean="0"/>
+              <a:rPr lang="en-US" altLang="zh-TW"/>
               <a:t>Click to edit Master title style</a:t>
             </a:r>
             <a:endParaRPr lang="zh-TW" altLang="en-US"/>
@@ -1512,7 +1512,7 @@
           <a:p>
             <a:pPr lvl="0"/>
             <a:r>
-              <a:rPr lang="en-US" altLang="zh-TW" smtClean="0"/>
+              <a:rPr lang="en-US" altLang="zh-TW"/>
               <a:t>Click to edit Master text styles</a:t>
             </a:r>
           </a:p>
@@ -1568,35 +1568,35 @@
           <a:p>
             <a:pPr lvl="0"/>
             <a:r>
-              <a:rPr lang="en-US" altLang="zh-TW" smtClean="0"/>
+              <a:rPr lang="en-US" altLang="zh-TW"/>
               <a:t>Click to edit Master text styles</a:t>
             </a:r>
           </a:p>
           <a:p>
             <a:pPr lvl="1"/>
             <a:r>
-              <a:rPr lang="en-US" altLang="zh-TW" smtClean="0"/>
+              <a:rPr lang="en-US" altLang="zh-TW"/>
               <a:t>Second level</a:t>
             </a:r>
           </a:p>
           <a:p>
             <a:pPr lvl="2"/>
             <a:r>
-              <a:rPr lang="en-US" altLang="zh-TW" smtClean="0"/>
+              <a:rPr lang="en-US" altLang="zh-TW"/>
               <a:t>Third level</a:t>
             </a:r>
           </a:p>
           <a:p>
             <a:pPr lvl="3"/>
             <a:r>
-              <a:rPr lang="en-US" altLang="zh-TW" smtClean="0"/>
+              <a:rPr lang="en-US" altLang="zh-TW"/>
               <a:t>Fourth level</a:t>
             </a:r>
           </a:p>
           <a:p>
             <a:pPr lvl="4"/>
             <a:r>
-              <a:rPr lang="en-US" altLang="zh-TW" smtClean="0"/>
+              <a:rPr lang="en-US" altLang="zh-TW"/>
               <a:t>Fifth level</a:t>
             </a:r>
             <a:endParaRPr lang="zh-TW" altLang="en-US"/>
@@ -1662,7 +1662,7 @@
           <a:p>
             <a:pPr lvl="0"/>
             <a:r>
-              <a:rPr lang="en-US" altLang="zh-TW" smtClean="0"/>
+              <a:rPr lang="en-US" altLang="zh-TW"/>
               <a:t>Click to edit Master text styles</a:t>
             </a:r>
           </a:p>
@@ -1718,35 +1718,35 @@
           <a:p>
             <a:pPr lvl="0"/>
             <a:r>
-              <a:rPr lang="en-US" altLang="zh-TW" smtClean="0"/>
+              <a:rPr lang="en-US" altLang="zh-TW"/>
               <a:t>Click to edit Master text styles</a:t>
             </a:r>
           </a:p>
           <a:p>
             <a:pPr lvl="1"/>
             <a:r>
-              <a:rPr lang="en-US" altLang="zh-TW" smtClean="0"/>
+              <a:rPr lang="en-US" altLang="zh-TW"/>
               <a:t>Second level</a:t>
             </a:r>
           </a:p>
           <a:p>
             <a:pPr lvl="2"/>
             <a:r>
-              <a:rPr lang="en-US" altLang="zh-TW" smtClean="0"/>
+              <a:rPr lang="en-US" altLang="zh-TW"/>
               <a:t>Third level</a:t>
             </a:r>
           </a:p>
           <a:p>
             <a:pPr lvl="3"/>
             <a:r>
-              <a:rPr lang="en-US" altLang="zh-TW" smtClean="0"/>
+              <a:rPr lang="en-US" altLang="zh-TW"/>
               <a:t>Fourth level</a:t>
             </a:r>
           </a:p>
           <a:p>
             <a:pPr lvl="4"/>
             <a:r>
-              <a:rPr lang="en-US" altLang="zh-TW" smtClean="0"/>
+              <a:rPr lang="en-US" altLang="zh-TW"/>
               <a:t>Fifth level</a:t>
             </a:r>
             <a:endParaRPr lang="zh-TW" altLang="en-US"/>
@@ -1771,7 +1771,7 @@
             <a:fld id="{BC4F40AC-92D7-480D-97D1-79286808B11F}" type="datetimeFigureOut">
               <a:rPr lang="zh-TW" altLang="en-US" smtClean="0"/>
               <a:pPr/>
-              <a:t>2023/6/3</a:t>
+              <a:t>2025/10/31</a:t>
             </a:fld>
             <a:endParaRPr lang="zh-TW" altLang="en-US"/>
           </a:p>
@@ -1861,7 +1861,7 @@
           <a:lstStyle/>
           <a:p>
             <a:r>
-              <a:rPr lang="en-US" altLang="zh-TW" smtClean="0"/>
+              <a:rPr lang="en-US" altLang="zh-TW"/>
               <a:t>Click to edit Master title style</a:t>
             </a:r>
             <a:endParaRPr lang="zh-TW" altLang="en-US"/>
@@ -1886,7 +1886,7 @@
             <a:fld id="{BC4F40AC-92D7-480D-97D1-79286808B11F}" type="datetimeFigureOut">
               <a:rPr lang="zh-TW" altLang="en-US" smtClean="0"/>
               <a:pPr/>
-              <a:t>2023/6/3</a:t>
+              <a:t>2025/10/31</a:t>
             </a:fld>
             <a:endParaRPr lang="zh-TW" altLang="en-US"/>
           </a:p>
@@ -1978,7 +1978,7 @@
             <a:fld id="{BC4F40AC-92D7-480D-97D1-79286808B11F}" type="datetimeFigureOut">
               <a:rPr lang="zh-TW" altLang="en-US" smtClean="0"/>
               <a:pPr/>
-              <a:t>2023/6/3</a:t>
+              <a:t>2025/10/31</a:t>
             </a:fld>
             <a:endParaRPr lang="zh-TW" altLang="en-US"/>
           </a:p>
@@ -2077,7 +2077,7 @@
           </a:lstStyle>
           <a:p>
             <a:r>
-              <a:rPr lang="en-US" altLang="zh-TW" smtClean="0"/>
+              <a:rPr lang="en-US" altLang="zh-TW"/>
               <a:t>Click to edit Master title style</a:t>
             </a:r>
             <a:endParaRPr lang="zh-TW" altLang="en-US"/>
@@ -2134,35 +2134,35 @@
           <a:p>
             <a:pPr lvl="0"/>
             <a:r>
-              <a:rPr lang="en-US" altLang="zh-TW" smtClean="0"/>
+              <a:rPr lang="en-US" altLang="zh-TW"/>
               <a:t>Click to edit Master text styles</a:t>
             </a:r>
           </a:p>
           <a:p>
             <a:pPr lvl="1"/>
             <a:r>
-              <a:rPr lang="en-US" altLang="zh-TW" smtClean="0"/>
+              <a:rPr lang="en-US" altLang="zh-TW"/>
               <a:t>Second level</a:t>
             </a:r>
           </a:p>
           <a:p>
             <a:pPr lvl="2"/>
             <a:r>
-              <a:rPr lang="en-US" altLang="zh-TW" smtClean="0"/>
+              <a:rPr lang="en-US" altLang="zh-TW"/>
               <a:t>Third level</a:t>
             </a:r>
           </a:p>
           <a:p>
             <a:pPr lvl="3"/>
             <a:r>
-              <a:rPr lang="en-US" altLang="zh-TW" smtClean="0"/>
+              <a:rPr lang="en-US" altLang="zh-TW"/>
               <a:t>Fourth level</a:t>
             </a:r>
           </a:p>
           <a:p>
             <a:pPr lvl="4"/>
             <a:r>
-              <a:rPr lang="en-US" altLang="zh-TW" smtClean="0"/>
+              <a:rPr lang="en-US" altLang="zh-TW"/>
               <a:t>Fifth level</a:t>
             </a:r>
             <a:endParaRPr lang="zh-TW" altLang="en-US"/>
@@ -2228,7 +2228,7 @@
           <a:p>
             <a:pPr lvl="0"/>
             <a:r>
-              <a:rPr lang="en-US" altLang="zh-TW" smtClean="0"/>
+              <a:rPr lang="en-US" altLang="zh-TW"/>
               <a:t>Click to edit Master text styles</a:t>
             </a:r>
           </a:p>
@@ -2252,7 +2252,7 @@
             <a:fld id="{BC4F40AC-92D7-480D-97D1-79286808B11F}" type="datetimeFigureOut">
               <a:rPr lang="zh-TW" altLang="en-US" smtClean="0"/>
               <a:pPr/>
-              <a:t>2023/6/3</a:t>
+              <a:t>2025/10/31</a:t>
             </a:fld>
             <a:endParaRPr lang="zh-TW" altLang="en-US"/>
           </a:p>
@@ -2351,7 +2351,7 @@
           </a:lstStyle>
           <a:p>
             <a:r>
-              <a:rPr lang="en-US" altLang="zh-TW" smtClean="0"/>
+              <a:rPr lang="en-US" altLang="zh-TW"/>
               <a:t>Click to edit Master title style</a:t>
             </a:r>
             <a:endParaRPr lang="zh-TW" altLang="en-US"/>
@@ -2416,7 +2416,7 @@
           </a:lstStyle>
           <a:p>
             <a:r>
-              <a:rPr lang="en-US" altLang="zh-TW" smtClean="0"/>
+              <a:rPr lang="en-US" altLang="zh-TW"/>
               <a:t>Click icon to add picture</a:t>
             </a:r>
             <a:endParaRPr lang="zh-TW" altLang="en-US"/>
@@ -2482,7 +2482,7 @@
           <a:p>
             <a:pPr lvl="0"/>
             <a:r>
-              <a:rPr lang="en-US" altLang="zh-TW" smtClean="0"/>
+              <a:rPr lang="en-US" altLang="zh-TW"/>
               <a:t>Click to edit Master text styles</a:t>
             </a:r>
           </a:p>
@@ -2506,7 +2506,7 @@
             <a:fld id="{BC4F40AC-92D7-480D-97D1-79286808B11F}" type="datetimeFigureOut">
               <a:rPr lang="zh-TW" altLang="en-US" smtClean="0"/>
               <a:pPr/>
-              <a:t>2023/6/3</a:t>
+              <a:t>2025/10/31</a:t>
             </a:fld>
             <a:endParaRPr lang="zh-TW" altLang="en-US"/>
           </a:p>
@@ -2616,10 +2616,9 @@
           <a:lstStyle/>
           <a:p>
             <a:r>
-              <a:rPr lang="zh-TW" altLang="en-US" smtClean="0"/>
+              <a:rPr lang="zh-TW" altLang="en-US"/>
               <a:t>按一下以編輯母片標題樣式</a:t>
             </a:r>
-            <a:endParaRPr lang="zh-TW" altLang="en-US"/>
           </a:p>
         </p:txBody>
       </p:sp>
@@ -2650,38 +2649,37 @@
           <a:p>
             <a:pPr lvl="0"/>
             <a:r>
-              <a:rPr lang="zh-TW" altLang="en-US" smtClean="0"/>
+              <a:rPr lang="zh-TW" altLang="en-US"/>
               <a:t>按一下以編輯母片文字樣式</a:t>
             </a:r>
           </a:p>
           <a:p>
             <a:pPr lvl="1"/>
             <a:r>
-              <a:rPr lang="zh-TW" altLang="en-US" smtClean="0"/>
+              <a:rPr lang="zh-TW" altLang="en-US"/>
               <a:t>第二層</a:t>
             </a:r>
           </a:p>
           <a:p>
             <a:pPr lvl="2"/>
             <a:r>
-              <a:rPr lang="zh-TW" altLang="en-US" smtClean="0"/>
+              <a:rPr lang="zh-TW" altLang="en-US"/>
               <a:t>第三層</a:t>
             </a:r>
           </a:p>
           <a:p>
             <a:pPr lvl="3"/>
             <a:r>
-              <a:rPr lang="zh-TW" altLang="en-US" smtClean="0"/>
+              <a:rPr lang="zh-TW" altLang="en-US"/>
               <a:t>第四層</a:t>
             </a:r>
           </a:p>
           <a:p>
             <a:pPr lvl="4"/>
             <a:r>
-              <a:rPr lang="zh-TW" altLang="en-US" smtClean="0"/>
+              <a:rPr lang="zh-TW" altLang="en-US"/>
               <a:t>第五層</a:t>
             </a:r>
-            <a:endParaRPr lang="zh-TW" altLang="en-US"/>
           </a:p>
         </p:txBody>
       </p:sp>
@@ -2721,7 +2719,7 @@
             <a:fld id="{BC4F40AC-92D7-480D-97D1-79286808B11F}" type="datetimeFigureOut">
               <a:rPr lang="zh-TW" altLang="en-US" smtClean="0"/>
               <a:pPr/>
-              <a:t>2023/6/3</a:t>
+              <a:t>2025/10/31</a:t>
             </a:fld>
             <a:endParaRPr lang="zh-TW" altLang="en-US"/>
           </a:p>
@@ -3115,7 +3113,7 @@
           <a:lstStyle/>
           <a:p>
             <a:r>
-              <a:rPr lang="zh-CN" altLang="en-US" sz="5400" b="1" i="1" dirty="0" smtClean="0">
+              <a:rPr lang="zh-CN" altLang="en-US" sz="5400" b="1" i="1" dirty="0">
                 <a:solidFill>
                   <a:srgbClr val="000066"/>
                 </a:solidFill>
@@ -3129,41 +3127,7 @@
                 <a:latin typeface="微軟正黑體" pitchFamily="34" charset="-120"/>
                 <a:ea typeface="微軟正黑體" pitchFamily="34" charset="-120"/>
               </a:rPr>
-              <a:t>祢</a:t>
-            </a:r>
-            <a:r>
-              <a:rPr lang="zh-CN" altLang="en-US" sz="5400" b="1" i="1" dirty="0">
-                <a:solidFill>
-                  <a:srgbClr val="000066"/>
-                </a:solidFill>
-                <a:effectLst>
-                  <a:outerShdw blurRad="38100" dist="38100" dir="2700000" algn="tl">
-                    <a:srgbClr val="000000">
-                      <a:alpha val="43137"/>
-                    </a:srgbClr>
-                  </a:outerShdw>
-                </a:effectLst>
-                <a:latin typeface="微軟正黑體" pitchFamily="34" charset="-120"/>
-                <a:ea typeface="微軟正黑體" pitchFamily="34" charset="-120"/>
-              </a:rPr>
-              <a:t>愛</a:t>
-            </a:r>
-            <a:r>
-              <a:rPr lang="zh-CN" altLang="en-US" sz="5400" b="1" i="1" dirty="0">
-                <a:solidFill>
-                  <a:srgbClr val="000066"/>
-                </a:solidFill>
-                <a:effectLst>
-                  <a:outerShdw blurRad="38100" dist="38100" dir="2700000" algn="tl">
-                    <a:srgbClr val="000000">
-                      <a:alpha val="43137"/>
-                    </a:srgbClr>
-                  </a:outerShdw>
-                </a:effectLst>
-                <a:latin typeface="微軟正黑體" pitchFamily="34" charset="-120"/>
-                <a:ea typeface="微軟正黑體" pitchFamily="34" charset="-120"/>
-              </a:rPr>
-              <a:t>永不變</a:t>
+              <a:t>祢愛永不變</a:t>
             </a:r>
             <a:endParaRPr lang="zh-TW" altLang="en-US" sz="5400" b="1" i="1" dirty="0">
               <a:solidFill>
@@ -3255,27 +3219,7 @@
                 <a:latin typeface="微軟正黑體" pitchFamily="34" charset="-120"/>
                 <a:ea typeface="微軟正黑體" pitchFamily="34" charset="-120"/>
               </a:rPr>
-              <a:t>流</a:t>
-            </a:r>
-            <a:r>
-              <a:rPr lang="zh-TW" altLang="en-US" sz="4800" b="1" dirty="0">
-                <a:solidFill>
-                  <a:srgbClr val="000066"/>
-                </a:solidFill>
-                <a:latin typeface="微軟正黑體" pitchFamily="34" charset="-120"/>
-                <a:ea typeface="微軟正黑體" pitchFamily="34" charset="-120"/>
-              </a:rPr>
-              <a:t>出</a:t>
-            </a:r>
-            <a:r>
-              <a:rPr lang="zh-TW" altLang="en-US" sz="4800" b="1" dirty="0">
-                <a:solidFill>
-                  <a:srgbClr val="000066"/>
-                </a:solidFill>
-                <a:latin typeface="微軟正黑體" pitchFamily="34" charset="-120"/>
-                <a:ea typeface="微軟正黑體" pitchFamily="34" charset="-120"/>
-              </a:rPr>
-              <a:t>寶血   洗淨我污穢</a:t>
+              <a:t>流出寶血   洗淨我污穢</a:t>
             </a:r>
             <a:endParaRPr lang="en-US" altLang="zh-TW" sz="4800" b="1" dirty="0">
               <a:solidFill>
@@ -3299,7 +3243,7 @@
               </a:rPr>
               <a:t>將我的生命贖回</a:t>
             </a:r>
-            <a:endParaRPr lang="en-US" altLang="zh-TW" sz="4800" b="1" dirty="0" smtClean="0">
+            <a:endParaRPr lang="en-US" altLang="zh-TW" sz="4800" b="1" dirty="0">
               <a:solidFill>
                 <a:srgbClr val="000066"/>
               </a:solidFill>
@@ -3345,7 +3289,7 @@
               <a:t>( </a:t>
             </a:r>
             <a:r>
-              <a:rPr lang="zh-CN" altLang="en-US" sz="3200" b="1" dirty="0" smtClean="0">
+              <a:rPr lang="zh-CN" altLang="en-US" sz="3200" b="1" dirty="0">
                 <a:solidFill>
                   <a:srgbClr val="000066"/>
                 </a:solidFill>
@@ -3353,10 +3297,10 @@
                 <a:latin typeface="Microsoft JhengHei" panose="020B0604030504040204" pitchFamily="34" charset="-120"/>
                 <a:ea typeface="Microsoft JhengHei" panose="020B0604030504040204" pitchFamily="34" charset="-120"/>
               </a:rPr>
-              <a:t>正</a:t>
-            </a:r>
-            <a:r>
-              <a:rPr lang="en-US" sz="3200" b="1" dirty="0" smtClean="0">
+              <a:t>正歌</a:t>
+            </a:r>
+            <a:r>
+              <a:rPr lang="en-US" sz="3200" b="1" dirty="0">
                 <a:solidFill>
                   <a:srgbClr val="000066"/>
                 </a:solidFill>
@@ -3442,24 +3386,14 @@
               <a:t>祢</a:t>
             </a:r>
             <a:r>
-              <a:rPr lang="zh-TW" altLang="en-US" sz="4800" b="1" dirty="0" smtClean="0">
+              <a:rPr lang="zh-TW" altLang="en-US" sz="4800" b="1" dirty="0">
                 <a:solidFill>
                   <a:srgbClr val="000066"/>
                 </a:solidFill>
                 <a:latin typeface="微軟正黑體" pitchFamily="34" charset="-120"/>
                 <a:ea typeface="微軟正黑體" pitchFamily="34" charset="-120"/>
               </a:rPr>
-              <a:t>為</a:t>
-            </a:r>
-            <a:r>
-              <a:rPr lang="zh-TW" altLang="en-US" sz="4800" b="1" dirty="0">
-                <a:solidFill>
-                  <a:srgbClr val="000066"/>
-                </a:solidFill>
-                <a:latin typeface="微軟正黑體" pitchFamily="34" charset="-120"/>
-                <a:ea typeface="微軟正黑體" pitchFamily="34" charset="-120"/>
-              </a:rPr>
-              <a:t>了我的罪</a:t>
+              <a:t>為了我的罪</a:t>
             </a:r>
             <a:r>
               <a:rPr lang="en-US" altLang="zh-TW" sz="4800" b="1" dirty="0">
@@ -3501,47 +3435,27 @@
                 <a:latin typeface="微軟正黑體" pitchFamily="34" charset="-120"/>
                 <a:ea typeface="微軟正黑體" pitchFamily="34" charset="-120"/>
               </a:rPr>
-              <a:t>顯</a:t>
-            </a:r>
-            <a:r>
-              <a:rPr lang="zh-TW" altLang="en-US" sz="4800" b="1" dirty="0" smtClean="0">
+              <a:t>顯明</a:t>
+            </a:r>
+            <a:r>
+              <a:rPr lang="zh-CN" altLang="en-US" sz="4800" b="1" dirty="0">
                 <a:solidFill>
                   <a:srgbClr val="000066"/>
                 </a:solidFill>
                 <a:latin typeface="微軟正黑體" pitchFamily="34" charset="-120"/>
                 <a:ea typeface="微軟正黑體" pitchFamily="34" charset="-120"/>
               </a:rPr>
-              <a:t>明</a:t>
-            </a:r>
-            <a:r>
-              <a:rPr lang="zh-CN" altLang="en-US" sz="4800" b="1" dirty="0">
+              <a:t>祢</a:t>
+            </a:r>
+            <a:r>
+              <a:rPr lang="zh-TW" altLang="en-US" sz="4800" b="1" dirty="0">
                 <a:solidFill>
                   <a:srgbClr val="000066"/>
                 </a:solidFill>
                 <a:latin typeface="微軟正黑體" pitchFamily="34" charset="-120"/>
                 <a:ea typeface="微軟正黑體" pitchFamily="34" charset="-120"/>
               </a:rPr>
-              <a:t>祢</a:t>
-            </a:r>
-            <a:r>
-              <a:rPr lang="zh-TW" altLang="en-US" sz="4800" b="1" dirty="0" smtClean="0">
-                <a:solidFill>
-                  <a:srgbClr val="000066"/>
-                </a:solidFill>
-                <a:latin typeface="微軟正黑體" pitchFamily="34" charset="-120"/>
-                <a:ea typeface="微軟正黑體" pitchFamily="34" charset="-120"/>
-              </a:rPr>
-              <a:t>極</a:t>
-            </a:r>
-            <a:r>
-              <a:rPr lang="zh-TW" altLang="en-US" sz="4800" b="1" dirty="0">
-                <a:solidFill>
-                  <a:srgbClr val="000066"/>
-                </a:solidFill>
-                <a:latin typeface="微軟正黑體" pitchFamily="34" charset="-120"/>
-                <a:ea typeface="微軟正黑體" pitchFamily="34" charset="-120"/>
-              </a:rPr>
-              <a:t>大恩惠</a:t>
+              <a:t>極大恩惠</a:t>
             </a:r>
             <a:endParaRPr lang="vi-VN" sz="4800" b="1" dirty="0">
               <a:solidFill>
@@ -3593,7 +3507,7 @@
                 <a:latin typeface="Microsoft JhengHei" panose="020B0604030504040204" pitchFamily="34" charset="-120"/>
                 <a:ea typeface="Microsoft JhengHei" panose="020B0604030504040204" pitchFamily="34" charset="-120"/>
               </a:rPr>
-              <a:t>正</a:t>
+              <a:t>正歌</a:t>
             </a:r>
             <a:r>
               <a:rPr lang="en-US" sz="3200" b="1" dirty="0">
@@ -3609,7 +3523,6 @@
               <a:solidFill>
                 <a:srgbClr val="000066"/>
               </a:solidFill>
-              <a:latin typeface="Microsoft JhengHei" panose="020B0604030504040204" pitchFamily="34" charset="-120"/>
               <a:ea typeface="Microsoft JhengHei" panose="020B0604030504040204" pitchFamily="34" charset="-120"/>
             </a:endParaRPr>
           </a:p>
@@ -3678,47 +3591,27 @@
                 <a:latin typeface="微軟正黑體" pitchFamily="34" charset="-120"/>
                 <a:ea typeface="微軟正黑體" pitchFamily="34" charset="-120"/>
               </a:rPr>
-              <a:t>我深深體</a:t>
-            </a:r>
-            <a:r>
-              <a:rPr lang="zh-TW" altLang="en-US" sz="4800" b="1" dirty="0" smtClean="0">
+              <a:t>我深深體會  </a:t>
+            </a:r>
+            <a:r>
+              <a:rPr lang="zh-CN" altLang="en-US" sz="4800" b="1" dirty="0">
                 <a:solidFill>
                   <a:srgbClr val="000066"/>
                 </a:solidFill>
                 <a:latin typeface="微軟正黑體" pitchFamily="34" charset="-120"/>
                 <a:ea typeface="微軟正黑體" pitchFamily="34" charset="-120"/>
               </a:rPr>
-              <a:t>會  </a:t>
-            </a:r>
-            <a:r>
-              <a:rPr lang="zh-CN" altLang="en-US" sz="4800" b="1" dirty="0" smtClean="0">
+              <a:t>祢</a:t>
+            </a:r>
+            <a:r>
+              <a:rPr lang="zh-TW" altLang="en-US" sz="4800" b="1" dirty="0">
                 <a:solidFill>
                   <a:srgbClr val="000066"/>
                 </a:solidFill>
                 <a:latin typeface="微軟正黑體" pitchFamily="34" charset="-120"/>
                 <a:ea typeface="微軟正黑體" pitchFamily="34" charset="-120"/>
               </a:rPr>
-              <a:t>祢</a:t>
-            </a:r>
-            <a:r>
-              <a:rPr lang="zh-TW" altLang="en-US" sz="4800" b="1" dirty="0" smtClean="0">
-                <a:solidFill>
-                  <a:srgbClr val="000066"/>
-                </a:solidFill>
-                <a:latin typeface="微軟正黑體" pitchFamily="34" charset="-120"/>
-                <a:ea typeface="微軟正黑體" pitchFamily="34" charset="-120"/>
-              </a:rPr>
-              <a:t>愛</a:t>
-            </a:r>
-            <a:r>
-              <a:rPr lang="zh-TW" altLang="en-US" sz="4800" b="1" dirty="0">
-                <a:solidFill>
-                  <a:srgbClr val="000066"/>
-                </a:solidFill>
-                <a:latin typeface="微軟正黑體" pitchFamily="34" charset="-120"/>
-                <a:ea typeface="微軟正黑體" pitchFamily="34" charset="-120"/>
-              </a:rPr>
-              <a:t>的寶貴</a:t>
+              <a:t>愛的寶貴</a:t>
             </a:r>
             <a:endParaRPr lang="en-US" altLang="zh-TW" sz="4800" b="1" dirty="0">
               <a:solidFill>
@@ -3793,7 +3686,7 @@
                 <a:latin typeface="Microsoft JhengHei" panose="020B0604030504040204" pitchFamily="34" charset="-120"/>
                 <a:ea typeface="Microsoft JhengHei" panose="020B0604030504040204" pitchFamily="34" charset="-120"/>
               </a:rPr>
-              <a:t>正</a:t>
+              <a:t>正歌</a:t>
             </a:r>
             <a:r>
               <a:rPr lang="en-US" sz="3200" b="1" dirty="0">
@@ -3888,37 +3781,17 @@
                 <a:latin typeface="微軟正黑體" pitchFamily="34" charset="-120"/>
                 <a:ea typeface="微軟正黑體" pitchFamily="34" charset="-120"/>
               </a:rPr>
-              <a:t>  </a:t>
-            </a:r>
-            <a:r>
-              <a:rPr lang="en-US" altLang="zh-TW" sz="4800" b="1" dirty="0" smtClean="0">
+              <a:t>   </a:t>
+            </a:r>
+            <a:r>
+              <a:rPr lang="zh-TW" altLang="en-US" sz="4800" b="1" dirty="0">
                 <a:solidFill>
                   <a:srgbClr val="000066"/>
                 </a:solidFill>
                 <a:latin typeface="微軟正黑體" pitchFamily="34" charset="-120"/>
                 <a:ea typeface="微軟正黑體" pitchFamily="34" charset="-120"/>
               </a:rPr>
-              <a:t> </a:t>
-            </a:r>
-            <a:r>
-              <a:rPr lang="zh-TW" altLang="en-US" sz="4800" b="1" dirty="0" smtClean="0">
-                <a:solidFill>
-                  <a:srgbClr val="000066"/>
-                </a:solidFill>
-                <a:latin typeface="微軟正黑體" pitchFamily="34" charset="-120"/>
-                <a:ea typeface="微軟正黑體" pitchFamily="34" charset="-120"/>
-              </a:rPr>
-              <a:t>或</a:t>
-            </a:r>
-            <a:r>
-              <a:rPr lang="zh-TW" altLang="en-US" sz="4800" b="1" dirty="0">
-                <a:solidFill>
-                  <a:srgbClr val="000066"/>
-                </a:solidFill>
-                <a:latin typeface="微軟正黑體" pitchFamily="34" charset="-120"/>
-                <a:ea typeface="微軟正黑體" pitchFamily="34" charset="-120"/>
-              </a:rPr>
-              <a:t>生離或死別</a:t>
+              <a:t>或生離或死別</a:t>
             </a:r>
             <a:endParaRPr lang="en-US" altLang="zh-TW" sz="4800" b="1" dirty="0">
               <a:solidFill>
@@ -3992,7 +3865,7 @@
                 <a:latin typeface="Microsoft JhengHei" panose="020B0604030504040204" pitchFamily="34" charset="-120"/>
                 <a:ea typeface="Microsoft JhengHei" panose="020B0604030504040204" pitchFamily="34" charset="-120"/>
               </a:rPr>
-              <a:t>正</a:t>
+              <a:t>正歌</a:t>
             </a:r>
             <a:r>
               <a:rPr lang="en-US" sz="3200" b="1" dirty="0">
@@ -4070,7 +3943,7 @@
               <a:buNone/>
             </a:pPr>
             <a:r>
-              <a:rPr lang="zh-TW" altLang="en-US" sz="4800" b="1" dirty="0" smtClean="0">
+              <a:rPr lang="zh-TW" altLang="en-US" sz="4800" b="1" dirty="0">
                 <a:solidFill>
                   <a:srgbClr val="000066"/>
                 </a:solidFill>
@@ -4080,7 +3953,7 @@
               <a:t>哦  </a:t>
             </a:r>
             <a:r>
-              <a:rPr lang="zh-CN" altLang="en-US" sz="4800" b="1" dirty="0" smtClean="0">
+              <a:rPr lang="zh-CN" altLang="en-US" sz="4800" b="1" dirty="0">
                 <a:solidFill>
                   <a:srgbClr val="000066"/>
                 </a:solidFill>
@@ -4090,24 +3963,14 @@
               <a:t>祢</a:t>
             </a:r>
             <a:r>
-              <a:rPr lang="zh-TW" altLang="en-US" sz="4800" b="1" dirty="0" smtClean="0">
+              <a:rPr lang="zh-TW" altLang="en-US" sz="4800" b="1" dirty="0">
                 <a:solidFill>
                   <a:srgbClr val="000066"/>
                 </a:solidFill>
                 <a:latin typeface="微軟正黑體" pitchFamily="34" charset="-120"/>
                 <a:ea typeface="微軟正黑體" pitchFamily="34" charset="-120"/>
               </a:rPr>
-              <a:t>愛</a:t>
-            </a:r>
-            <a:r>
-              <a:rPr lang="zh-TW" altLang="en-US" sz="4800" b="1" dirty="0">
-                <a:solidFill>
-                  <a:srgbClr val="000066"/>
-                </a:solidFill>
-                <a:latin typeface="微軟正黑體" pitchFamily="34" charset="-120"/>
-                <a:ea typeface="微軟正黑體" pitchFamily="34" charset="-120"/>
-              </a:rPr>
-              <a:t>永不變</a:t>
+              <a:t>愛永不變</a:t>
             </a:r>
             <a:r>
               <a:rPr lang="en-US" altLang="zh-TW" sz="4800" b="1" dirty="0">
@@ -4202,7 +4065,7 @@
                 <a:latin typeface="Microsoft JhengHei" panose="020B0604030504040204" pitchFamily="34" charset="-120"/>
                 <a:ea typeface="Microsoft JhengHei" panose="020B0604030504040204" pitchFamily="34" charset="-120"/>
               </a:rPr>
-              <a:t>副</a:t>
+              <a:t>副歌</a:t>
             </a:r>
             <a:r>
               <a:rPr lang="en-US" sz="3200" b="1" dirty="0">
@@ -4381,7 +4244,7 @@
                 <a:latin typeface="Microsoft JhengHei" panose="020B0604030504040204" pitchFamily="34" charset="-120"/>
                 <a:ea typeface="Microsoft JhengHei" panose="020B0604030504040204" pitchFamily="34" charset="-120"/>
               </a:rPr>
-              <a:t>副</a:t>
+              <a:t>副歌</a:t>
             </a:r>
             <a:r>
               <a:rPr lang="en-US" sz="3200" b="1" dirty="0">
@@ -4459,7 +4322,7 @@
               <a:buNone/>
             </a:pPr>
             <a:r>
-              <a:rPr lang="zh-TW" altLang="en-US" sz="4800" b="1" dirty="0" smtClean="0">
+              <a:rPr lang="zh-TW" altLang="en-US" sz="4800" b="1" dirty="0">
                 <a:solidFill>
                   <a:srgbClr val="000066"/>
                 </a:solidFill>
@@ -4469,7 +4332,7 @@
               <a:t>哦  </a:t>
             </a:r>
             <a:r>
-              <a:rPr lang="zh-CN" altLang="en-US" sz="4800" b="1" dirty="0" smtClean="0">
+              <a:rPr lang="zh-CN" altLang="en-US" sz="4800" b="1" dirty="0">
                 <a:solidFill>
                   <a:srgbClr val="000066"/>
                 </a:solidFill>
@@ -4479,24 +4342,14 @@
               <a:t>祢</a:t>
             </a:r>
             <a:r>
-              <a:rPr lang="zh-TW" altLang="en-US" sz="4800" b="1" dirty="0" smtClean="0">
+              <a:rPr lang="zh-TW" altLang="en-US" sz="4800" b="1" dirty="0">
                 <a:solidFill>
                   <a:srgbClr val="000066"/>
                 </a:solidFill>
                 <a:latin typeface="微軟正黑體" pitchFamily="34" charset="-120"/>
                 <a:ea typeface="微軟正黑體" pitchFamily="34" charset="-120"/>
               </a:rPr>
-              <a:t>愛</a:t>
-            </a:r>
-            <a:r>
-              <a:rPr lang="zh-TW" altLang="en-US" sz="4800" b="1" dirty="0">
-                <a:solidFill>
-                  <a:srgbClr val="000066"/>
-                </a:solidFill>
-                <a:latin typeface="微軟正黑體" pitchFamily="34" charset="-120"/>
-                <a:ea typeface="微軟正黑體" pitchFamily="34" charset="-120"/>
-              </a:rPr>
-              <a:t>永不變</a:t>
+              <a:t>愛永不變</a:t>
             </a:r>
             <a:r>
               <a:rPr lang="en-US" altLang="zh-TW" sz="4800" b="1" dirty="0">
@@ -4591,7 +4444,7 @@
                 <a:latin typeface="Microsoft JhengHei" panose="020B0604030504040204" pitchFamily="34" charset="-120"/>
                 <a:ea typeface="Microsoft JhengHei" panose="020B0604030504040204" pitchFamily="34" charset="-120"/>
               </a:rPr>
-              <a:t>副</a:t>
+              <a:t>副歌</a:t>
             </a:r>
             <a:r>
               <a:rPr lang="en-US" sz="3200" b="1" dirty="0">
@@ -4686,37 +4539,17 @@
                 <a:latin typeface="微軟正黑體" pitchFamily="34" charset="-120"/>
                 <a:ea typeface="微軟正黑體" pitchFamily="34" charset="-120"/>
               </a:rPr>
-              <a:t>  </a:t>
-            </a:r>
-            <a:r>
-              <a:rPr lang="en-US" altLang="zh-TW" sz="4800" b="1" dirty="0" smtClean="0">
+              <a:t>   </a:t>
+            </a:r>
+            <a:r>
+              <a:rPr lang="zh-TW" altLang="en-US" sz="4800" b="1" dirty="0">
                 <a:solidFill>
                   <a:srgbClr val="000066"/>
                 </a:solidFill>
                 <a:latin typeface="微軟正黑體" pitchFamily="34" charset="-120"/>
                 <a:ea typeface="微軟正黑體" pitchFamily="34" charset="-120"/>
               </a:rPr>
-              <a:t> </a:t>
-            </a:r>
-            <a:r>
-              <a:rPr lang="zh-TW" altLang="en-US" sz="4800" b="1" dirty="0" smtClean="0">
-                <a:solidFill>
-                  <a:srgbClr val="000066"/>
-                </a:solidFill>
-                <a:latin typeface="微軟正黑體" pitchFamily="34" charset="-120"/>
-                <a:ea typeface="微軟正黑體" pitchFamily="34" charset="-120"/>
-              </a:rPr>
-              <a:t>經</a:t>
-            </a:r>
-            <a:r>
-              <a:rPr lang="zh-TW" altLang="en-US" sz="4800" b="1" dirty="0">
-                <a:solidFill>
-                  <a:srgbClr val="000066"/>
-                </a:solidFill>
-                <a:latin typeface="微軟正黑體" pitchFamily="34" charset="-120"/>
-                <a:ea typeface="微軟正黑體" pitchFamily="34" charset="-120"/>
-              </a:rPr>
-              <a:t>滄海歷桑田</a:t>
+              <a:t>經滄海歷桑田</a:t>
             </a:r>
             <a:endParaRPr lang="en-US" altLang="zh-TW" sz="4800" b="1" dirty="0">
               <a:solidFill>
@@ -4738,47 +4571,27 @@
                 <a:latin typeface="微軟正黑體" pitchFamily="34" charset="-120"/>
                 <a:ea typeface="微軟正黑體" pitchFamily="34" charset="-120"/>
               </a:rPr>
-              <a:t>都不能叫我</a:t>
-            </a:r>
-            <a:r>
-              <a:rPr lang="zh-TW" altLang="en-US" sz="4800" b="1" dirty="0" smtClean="0">
+              <a:t>都不能叫我與</a:t>
+            </a:r>
+            <a:r>
+              <a:rPr lang="zh-CN" altLang="en-US" sz="4800" b="1" dirty="0">
                 <a:solidFill>
                   <a:srgbClr val="000066"/>
                 </a:solidFill>
                 <a:latin typeface="微軟正黑體" pitchFamily="34" charset="-120"/>
                 <a:ea typeface="微軟正黑體" pitchFamily="34" charset="-120"/>
               </a:rPr>
-              <a:t>與</a:t>
-            </a:r>
-            <a:r>
-              <a:rPr lang="zh-CN" altLang="en-US" sz="4800" b="1" dirty="0">
+              <a:t>祢</a:t>
+            </a:r>
+            <a:r>
+              <a:rPr lang="zh-TW" altLang="en-US" sz="4800" b="1" dirty="0">
                 <a:solidFill>
                   <a:srgbClr val="000066"/>
                 </a:solidFill>
                 <a:latin typeface="微軟正黑體" pitchFamily="34" charset="-120"/>
                 <a:ea typeface="微軟正黑體" pitchFamily="34" charset="-120"/>
               </a:rPr>
-              <a:t>祢</a:t>
-            </a:r>
-            <a:r>
-              <a:rPr lang="zh-TW" altLang="en-US" sz="4800" b="1" dirty="0" smtClean="0">
-                <a:solidFill>
-                  <a:srgbClr val="000066"/>
-                </a:solidFill>
-                <a:latin typeface="微軟正黑體" pitchFamily="34" charset="-120"/>
-                <a:ea typeface="微軟正黑體" pitchFamily="34" charset="-120"/>
-              </a:rPr>
-              <a:t>愛</a:t>
-            </a:r>
-            <a:r>
-              <a:rPr lang="zh-TW" altLang="en-US" sz="4800" b="1" dirty="0">
-                <a:solidFill>
-                  <a:srgbClr val="000066"/>
-                </a:solidFill>
-                <a:latin typeface="微軟正黑體" pitchFamily="34" charset="-120"/>
-                <a:ea typeface="微軟正黑體" pitchFamily="34" charset="-120"/>
-              </a:rPr>
-              <a:t>隔絕</a:t>
+              <a:t>愛隔絕</a:t>
             </a:r>
             <a:endParaRPr lang="vi-VN" sz="4800" b="1" dirty="0">
               <a:solidFill>
@@ -4830,7 +4643,7 @@
                 <a:latin typeface="Microsoft JhengHei" panose="020B0604030504040204" pitchFamily="34" charset="-120"/>
                 <a:ea typeface="Microsoft JhengHei" panose="020B0604030504040204" pitchFamily="34" charset="-120"/>
               </a:rPr>
-              <a:t>副</a:t>
+              <a:t>副歌</a:t>
             </a:r>
             <a:r>
               <a:rPr lang="en-US" sz="3200" b="1" dirty="0">
